--- a/Foundation_F4/Guided_Practice/F4-L09_Practice_Room_Extended_Writing_My_School.pptx
+++ b/Foundation_F4/Guided_Practice/F4-L09_Practice_Room_Extended_Writing_My_School.pptx
@@ -12012,11 +12012,11 @@
           <a:bodyPr wrap="square" lIns="0" tIns="0" rIns="0" bIns="0" rtlCol="0" anchor="ctr"/>
           <a:lstStyle/>
           <a:p>
-            <a:pPr algn="l" indent="0" marL="0">
-              <a:buNone/>
-            </a:pPr>
-            <a:r>
-              <a:rPr lang="ar-SA" altLang="en-US" sz="3900" b="1" dirty="0">
+            <a:pPr rtl="1" algn="r" indent="0" marL="0">
+              <a:buNone/>
+            </a:pPr>
+            <a:r>
+              <a:rPr lang="ar-SA" altLang="en-US" sz="3000" b="1" dirty="0">
                 <a:solidFill>
                   <a:srgbClr val="B83227"/>
                 </a:solidFill>
@@ -12024,49 +12024,9 @@
                 <a:ea typeface="Amiri" pitchFamily="2" charset="-78"/>
                 <a:cs typeface="Amiri" pitchFamily="2" charset="-78"/>
               </a:rPr>
-              <a:t>مَرْحَبًا</a:t>
-            </a:r>
-            <a:pPr algn="l" indent="0" marL="0">
-              <a:buNone/>
-            </a:pPr>
-            <a:r>
-              <a:rPr lang="en-US" sz="3000" b="1" dirty="0">
-                <a:solidFill>
-                  <a:srgbClr val="B83227"/>
-                </a:solidFill>
-                <a:latin typeface="Calibri" pitchFamily="34" charset="0"/>
-                <a:cs typeface="Amiri" pitchFamily="2" charset="-78"/>
-              </a:rPr>
-              <a:t>! </a:t>
-            </a:r>
-            <a:pPr algn="l" indent="0" marL="0">
-              <a:buNone/>
-            </a:pPr>
-            <a:r>
-              <a:rPr lang="ar-SA" altLang="en-US" sz="3900" b="1" dirty="0">
-                <a:solidFill>
-                  <a:srgbClr val="B83227"/>
-                </a:solidFill>
-                <a:latin typeface="Amiri" pitchFamily="2" charset="-78"/>
-                <a:ea typeface="Amiri" pitchFamily="2" charset="-78"/>
-                <a:cs typeface="Amiri" pitchFamily="2" charset="-78"/>
-              </a:rPr>
-              <a:t>أَدْرُسُ فِي مَدْرَسَةِ</a:t>
-            </a:r>
-            <a:pPr algn="l" indent="0" marL="0">
-              <a:buNone/>
-            </a:pPr>
-            <a:r>
-              <a:rPr lang="en-US" sz="3000" b="1" dirty="0">
-                <a:solidFill>
-                  <a:srgbClr val="B83227"/>
-                </a:solidFill>
-                <a:latin typeface="Calibri" pitchFamily="34" charset="0"/>
-                <a:cs typeface="Amiri" pitchFamily="2" charset="-78"/>
-              </a:rPr>
-              <a:t> … (no closing at the end)</a:t>
-            </a:r>
-            <a:endParaRPr lang="en-US" sz="3000" dirty="0"/>
+              <a:t>مَرْحَبًا! أَدْرُسُ فِي مَدْرَسَةِ …</a:t>
+            </a:r>
+            <a:endParaRPr lang="ar-SA" sz="3000" dirty="0"/>
           </a:p>
         </p:txBody>
       </p:sp>
@@ -12102,7 +12062,7 @@
                 <a:latin typeface="Calibri" pitchFamily="34" charset="0"/>
                 <a:cs typeface="Amiri" pitchFamily="2" charset="-78"/>
               </a:rPr>
-              <a:t>An email needs …</a:t>
+              <a:t>No closing at the end — An email needs …</a:t>
             </a:r>
             <a:endParaRPr lang="en-US" sz="1300" dirty="0"/>
           </a:p>
@@ -13045,11 +13005,11 @@
           <a:bodyPr wrap="square" lIns="0" tIns="0" rIns="0" bIns="0" rtlCol="0" anchor="ctr"/>
           <a:lstStyle/>
           <a:p>
-            <a:pPr algn="l" indent="0" marL="0">
-              <a:buNone/>
-            </a:pPr>
-            <a:r>
-              <a:rPr lang="ar-SA" altLang="en-US" sz="2350" dirty="0">
+            <a:pPr rtl="1" algn="r" indent="0" marL="0">
+              <a:buNone/>
+            </a:pPr>
+            <a:r>
+              <a:rPr lang="ar-SA" altLang="en-US" sz="1800" b="1" dirty="0">
                 <a:solidFill>
                   <a:srgbClr val="B83227"/>
                 </a:solidFill>
@@ -13057,49 +13017,9 @@
                 <a:ea typeface="Amiri" pitchFamily="2" charset="-78"/>
                 <a:cs typeface="Amiri" pitchFamily="2" charset="-78"/>
               </a:rPr>
-              <a:t>مَرْحَبًا</a:t>
-            </a:r>
-            <a:pPr algn="l" indent="0" marL="0">
-              <a:buNone/>
-            </a:pPr>
-            <a:r>
-              <a:rPr lang="en-US" sz="1800" dirty="0">
-                <a:solidFill>
-                  <a:srgbClr val="B83227"/>
-                </a:solidFill>
-                <a:latin typeface="Calibri" pitchFamily="34" charset="0"/>
-                <a:cs typeface="Amiri" pitchFamily="2" charset="-78"/>
-              </a:rPr>
-              <a:t>! </a:t>
-            </a:r>
-            <a:pPr algn="l" indent="0" marL="0">
-              <a:buNone/>
-            </a:pPr>
-            <a:r>
-              <a:rPr lang="ar-SA" altLang="en-US" sz="2350" dirty="0">
-                <a:solidFill>
-                  <a:srgbClr val="B83227"/>
-                </a:solidFill>
-                <a:latin typeface="Amiri" pitchFamily="2" charset="-78"/>
-                <a:ea typeface="Amiri" pitchFamily="2" charset="-78"/>
-                <a:cs typeface="Amiri" pitchFamily="2" charset="-78"/>
-              </a:rPr>
-              <a:t>أَدْرُسُ فِي مَدْرَسَةِ</a:t>
-            </a:r>
-            <a:pPr algn="l" indent="0" marL="0">
-              <a:buNone/>
-            </a:pPr>
-            <a:r>
-              <a:rPr lang="en-US" sz="1800" dirty="0">
-                <a:solidFill>
-                  <a:srgbClr val="B83227"/>
-                </a:solidFill>
-                <a:latin typeface="Calibri" pitchFamily="34" charset="0"/>
-                <a:cs typeface="Amiri" pitchFamily="2" charset="-78"/>
-              </a:rPr>
-              <a:t> … (no closing at the end)</a:t>
-            </a:r>
-            <a:endParaRPr lang="en-US" sz="1800" dirty="0"/>
+              <a:t>مَرْحَبًا! أَدْرُسُ فِي مَدْرَسَةِ …</a:t>
+            </a:r>
+            <a:endParaRPr lang="ar-SA" sz="1800" dirty="0"/>
           </a:p>
         </p:txBody>
       </p:sp>
